--- a/MyWebsite说明书.pptx
+++ b/MyWebsite说明书.pptx
@@ -4,10 +4,15 @@
   <p:sldMasterIdLst>
     <p:sldMasterId id="2147483648" r:id="rId1"/>
   </p:sldMasterIdLst>
+  <p:notesMasterIdLst>
+    <p:notesMasterId r:id="rId5"/>
+  </p:notesMasterIdLst>
   <p:sldIdLst>
     <p:sldId id="256" r:id="rId3"/>
     <p:sldId id="257" r:id="rId4"/>
-    <p:sldId id="258" r:id="rId5"/>
+    <p:sldId id="259" r:id="rId6"/>
+    <p:sldId id="260" r:id="rId7"/>
+    <p:sldId id="258" r:id="rId8"/>
   </p:sldIdLst>
   <p:sldSz cx="12192000" cy="6858000"/>
   <p:notesSz cx="6858000" cy="9144000"/>
@@ -123,6 +128,434 @@
     </p:ext>
   </p:extLst>
 </p:presentation>
+</file>
+
+<file path=ppt/notesMasters/notesMaster1.xml><?xml version="1.0" encoding="utf-8"?>
+<p:notesMaster xmlns:a="http://schemas.openxmlformats.org/drawingml/2006/main" xmlns:r="http://schemas.openxmlformats.org/officeDocument/2006/relationships" xmlns:p="http://schemas.openxmlformats.org/presentationml/2006/main">
+  <p:cSld>
+    <p:bg>
+      <p:bgRef idx="1001">
+        <a:schemeClr val="bg1"/>
+      </p:bgRef>
+    </p:bg>
+    <p:spTree>
+      <p:nvGrpSpPr>
+        <p:cNvPr id="1" name=""/>
+        <p:cNvGrpSpPr/>
+        <p:nvPr/>
+      </p:nvGrpSpPr>
+      <p:grpSpPr>
+        <a:xfrm>
+          <a:off x="0" y="0"/>
+          <a:ext cx="0" cy="0"/>
+          <a:chOff x="0" y="0"/>
+          <a:chExt cx="0" cy="0"/>
+        </a:xfrm>
+      </p:grpSpPr>
+      <p:sp>
+        <p:nvSpPr>
+          <p:cNvPr id="2" name="页眉占位符 1"/>
+          <p:cNvSpPr>
+            <a:spLocks noGrp="1"/>
+          </p:cNvSpPr>
+          <p:nvPr>
+            <p:ph type="hdr" sz="quarter"/>
+          </p:nvPr>
+        </p:nvSpPr>
+        <p:spPr>
+          <a:xfrm>
+            <a:off x="0" y="0"/>
+            <a:ext cx="2971800" cy="458788"/>
+          </a:xfrm>
+          <a:prstGeom prst="rect">
+            <a:avLst/>
+          </a:prstGeom>
+        </p:spPr>
+        <p:txBody>
+          <a:bodyPr vert="horz" lIns="91440" tIns="45720" rIns="91440" bIns="45720" rtlCol="0"/>
+          <a:lstStyle>
+            <a:lvl1pPr algn="l">
+              <a:defRPr sz="1200"/>
+            </a:lvl1pPr>
+          </a:lstStyle>
+          <a:p>
+            <a:endParaRPr lang="zh-CN" altLang="en-US"/>
+          </a:p>
+        </p:txBody>
+      </p:sp>
+      <p:sp>
+        <p:nvSpPr>
+          <p:cNvPr id="3" name="日期占位符 2"/>
+          <p:cNvSpPr>
+            <a:spLocks noGrp="1"/>
+          </p:cNvSpPr>
+          <p:nvPr>
+            <p:ph type="dt" idx="1"/>
+          </p:nvPr>
+        </p:nvSpPr>
+        <p:spPr>
+          <a:xfrm>
+            <a:off x="3884613" y="0"/>
+            <a:ext cx="2971800" cy="458788"/>
+          </a:xfrm>
+          <a:prstGeom prst="rect">
+            <a:avLst/>
+          </a:prstGeom>
+        </p:spPr>
+        <p:txBody>
+          <a:bodyPr vert="horz" lIns="91440" tIns="45720" rIns="91440" bIns="45720" rtlCol="0"/>
+          <a:lstStyle>
+            <a:lvl1pPr algn="r">
+              <a:defRPr sz="1200"/>
+            </a:lvl1pPr>
+          </a:lstStyle>
+          <a:p>
+            <a:fld id="{D2A48B96-639E-45A3-A0BA-2464DFDB1FAA}" type="datetimeFigureOut">
+              <a:rPr lang="zh-CN" altLang="en-US" smtClean="0"/>
+            </a:fld>
+            <a:endParaRPr lang="zh-CN" altLang="en-US"/>
+          </a:p>
+        </p:txBody>
+      </p:sp>
+      <p:sp>
+        <p:nvSpPr>
+          <p:cNvPr id="4" name="幻灯片图像占位符 3"/>
+          <p:cNvSpPr>
+            <a:spLocks noGrp="1" noRot="1" noChangeAspect="1"/>
+          </p:cNvSpPr>
+          <p:nvPr>
+            <p:ph type="sldImg" idx="2"/>
+          </p:nvPr>
+        </p:nvSpPr>
+        <p:spPr>
+          <a:xfrm>
+            <a:off x="685800" y="1143000"/>
+            <a:ext cx="5486400" cy="3086100"/>
+          </a:xfrm>
+          <a:prstGeom prst="rect">
+            <a:avLst/>
+          </a:prstGeom>
+          <a:noFill/>
+          <a:ln w="12700">
+            <a:solidFill>
+              <a:prstClr val="black"/>
+            </a:solidFill>
+          </a:ln>
+        </p:spPr>
+        <p:txBody>
+          <a:bodyPr vert="horz" lIns="91440" tIns="45720" rIns="91440" bIns="45720" rtlCol="0" anchor="ctr"/>
+          <a:lstStyle/>
+          <a:p>
+            <a:endParaRPr lang="zh-CN" altLang="en-US"/>
+          </a:p>
+        </p:txBody>
+      </p:sp>
+      <p:sp>
+        <p:nvSpPr>
+          <p:cNvPr id="5" name="备注占位符 4"/>
+          <p:cNvSpPr>
+            <a:spLocks noGrp="1"/>
+          </p:cNvSpPr>
+          <p:nvPr>
+            <p:ph type="body" sz="quarter" idx="3"/>
+          </p:nvPr>
+        </p:nvSpPr>
+        <p:spPr>
+          <a:xfrm>
+            <a:off x="685800" y="4400550"/>
+            <a:ext cx="5486400" cy="3600450"/>
+          </a:xfrm>
+          <a:prstGeom prst="rect">
+            <a:avLst/>
+          </a:prstGeom>
+        </p:spPr>
+        <p:txBody>
+          <a:bodyPr vert="horz" lIns="91440" tIns="45720" rIns="91440" bIns="45720" rtlCol="0"/>
+          <a:lstStyle/>
+          <a:p>
+            <a:pPr lvl="0"/>
+            <a:r>
+              <a:rPr lang="zh-CN" altLang="en-US" smtClean="0"/>
+              <a:t>单击此处编辑母版文本样式</a:t>
+            </a:r>
+            <a:endParaRPr lang="zh-CN" altLang="en-US" smtClean="0"/>
+          </a:p>
+          <a:p>
+            <a:pPr lvl="1"/>
+            <a:r>
+              <a:rPr lang="zh-CN" altLang="en-US" smtClean="0"/>
+              <a:t>第二级</a:t>
+            </a:r>
+            <a:endParaRPr lang="zh-CN" altLang="en-US" smtClean="0"/>
+          </a:p>
+          <a:p>
+            <a:pPr lvl="2"/>
+            <a:r>
+              <a:rPr lang="zh-CN" altLang="en-US" smtClean="0"/>
+              <a:t>第三级</a:t>
+            </a:r>
+            <a:endParaRPr lang="zh-CN" altLang="en-US" smtClean="0"/>
+          </a:p>
+          <a:p>
+            <a:pPr lvl="3"/>
+            <a:r>
+              <a:rPr lang="zh-CN" altLang="en-US" smtClean="0"/>
+              <a:t>第四级</a:t>
+            </a:r>
+            <a:endParaRPr lang="zh-CN" altLang="en-US" smtClean="0"/>
+          </a:p>
+          <a:p>
+            <a:pPr lvl="4"/>
+            <a:r>
+              <a:rPr lang="zh-CN" altLang="en-US" smtClean="0"/>
+              <a:t>第五级</a:t>
+            </a:r>
+            <a:endParaRPr lang="zh-CN" altLang="en-US"/>
+          </a:p>
+        </p:txBody>
+      </p:sp>
+      <p:sp>
+        <p:nvSpPr>
+          <p:cNvPr id="6" name="页脚占位符 5"/>
+          <p:cNvSpPr>
+            <a:spLocks noGrp="1"/>
+          </p:cNvSpPr>
+          <p:nvPr>
+            <p:ph type="ftr" sz="quarter" idx="4"/>
+          </p:nvPr>
+        </p:nvSpPr>
+        <p:spPr>
+          <a:xfrm>
+            <a:off x="0" y="8685213"/>
+            <a:ext cx="2971800" cy="458787"/>
+          </a:xfrm>
+          <a:prstGeom prst="rect">
+            <a:avLst/>
+          </a:prstGeom>
+        </p:spPr>
+        <p:txBody>
+          <a:bodyPr vert="horz" lIns="91440" tIns="45720" rIns="91440" bIns="45720" rtlCol="0" anchor="b"/>
+          <a:lstStyle>
+            <a:lvl1pPr algn="l">
+              <a:defRPr sz="1200"/>
+            </a:lvl1pPr>
+          </a:lstStyle>
+          <a:p>
+            <a:endParaRPr lang="zh-CN" altLang="en-US"/>
+          </a:p>
+        </p:txBody>
+      </p:sp>
+      <p:sp>
+        <p:nvSpPr>
+          <p:cNvPr id="7" name="灯片编号占位符 6"/>
+          <p:cNvSpPr>
+            <a:spLocks noGrp="1"/>
+          </p:cNvSpPr>
+          <p:nvPr>
+            <p:ph type="sldNum" sz="quarter" idx="5"/>
+          </p:nvPr>
+        </p:nvSpPr>
+        <p:spPr>
+          <a:xfrm>
+            <a:off x="3884613" y="8685213"/>
+            <a:ext cx="2971800" cy="458787"/>
+          </a:xfrm>
+          <a:prstGeom prst="rect">
+            <a:avLst/>
+          </a:prstGeom>
+        </p:spPr>
+        <p:txBody>
+          <a:bodyPr vert="horz" lIns="91440" tIns="45720" rIns="91440" bIns="45720" rtlCol="0" anchor="b"/>
+          <a:lstStyle>
+            <a:lvl1pPr algn="r">
+              <a:defRPr sz="1200"/>
+            </a:lvl1pPr>
+          </a:lstStyle>
+          <a:p>
+            <a:fld id="{A6837353-30EB-4A48-80EB-173D804AEFBD}" type="slidenum">
+              <a:rPr lang="zh-CN" altLang="en-US" smtClean="0"/>
+            </a:fld>
+            <a:endParaRPr lang="zh-CN" altLang="en-US"/>
+          </a:p>
+        </p:txBody>
+      </p:sp>
+    </p:spTree>
+  </p:cSld>
+  <p:clrMap bg1="lt1" tx1="dk1" bg2="lt2" tx2="dk2" accent1="accent1" accent2="accent2" accent3="accent3" accent4="accent4" accent5="accent5" accent6="accent6" hlink="hlink" folHlink="folHlink"/>
+  <p:notesStyle>
+    <a:lvl1pPr marL="0" algn="l" defTabSz="914400" rtl="0" eaLnBrk="1" latinLnBrk="0" hangingPunct="1">
+      <a:defRPr sz="1200" kern="1200">
+        <a:solidFill>
+          <a:schemeClr val="tx1"/>
+        </a:solidFill>
+        <a:latin typeface="+mn-lt"/>
+        <a:ea typeface="+mn-ea"/>
+        <a:cs typeface="+mn-cs"/>
+      </a:defRPr>
+    </a:lvl1pPr>
+    <a:lvl2pPr marL="457200" algn="l" defTabSz="914400" rtl="0" eaLnBrk="1" latinLnBrk="0" hangingPunct="1">
+      <a:defRPr sz="1200" kern="1200">
+        <a:solidFill>
+          <a:schemeClr val="tx1"/>
+        </a:solidFill>
+        <a:latin typeface="+mn-lt"/>
+        <a:ea typeface="+mn-ea"/>
+        <a:cs typeface="+mn-cs"/>
+      </a:defRPr>
+    </a:lvl2pPr>
+    <a:lvl3pPr marL="914400" algn="l" defTabSz="914400" rtl="0" eaLnBrk="1" latinLnBrk="0" hangingPunct="1">
+      <a:defRPr sz="1200" kern="1200">
+        <a:solidFill>
+          <a:schemeClr val="tx1"/>
+        </a:solidFill>
+        <a:latin typeface="+mn-lt"/>
+        <a:ea typeface="+mn-ea"/>
+        <a:cs typeface="+mn-cs"/>
+      </a:defRPr>
+    </a:lvl3pPr>
+    <a:lvl4pPr marL="1371600" algn="l" defTabSz="914400" rtl="0" eaLnBrk="1" latinLnBrk="0" hangingPunct="1">
+      <a:defRPr sz="1200" kern="1200">
+        <a:solidFill>
+          <a:schemeClr val="tx1"/>
+        </a:solidFill>
+        <a:latin typeface="+mn-lt"/>
+        <a:ea typeface="+mn-ea"/>
+        <a:cs typeface="+mn-cs"/>
+      </a:defRPr>
+    </a:lvl4pPr>
+    <a:lvl5pPr marL="1828800" algn="l" defTabSz="914400" rtl="0" eaLnBrk="1" latinLnBrk="0" hangingPunct="1">
+      <a:defRPr sz="1200" kern="1200">
+        <a:solidFill>
+          <a:schemeClr val="tx1"/>
+        </a:solidFill>
+        <a:latin typeface="+mn-lt"/>
+        <a:ea typeface="+mn-ea"/>
+        <a:cs typeface="+mn-cs"/>
+      </a:defRPr>
+    </a:lvl5pPr>
+    <a:lvl6pPr marL="2286000" algn="l" defTabSz="914400" rtl="0" eaLnBrk="1" latinLnBrk="0" hangingPunct="1">
+      <a:defRPr sz="1200" kern="1200">
+        <a:solidFill>
+          <a:schemeClr val="tx1"/>
+        </a:solidFill>
+        <a:latin typeface="+mn-lt"/>
+        <a:ea typeface="+mn-ea"/>
+        <a:cs typeface="+mn-cs"/>
+      </a:defRPr>
+    </a:lvl6pPr>
+    <a:lvl7pPr marL="2743200" algn="l" defTabSz="914400" rtl="0" eaLnBrk="1" latinLnBrk="0" hangingPunct="1">
+      <a:defRPr sz="1200" kern="1200">
+        <a:solidFill>
+          <a:schemeClr val="tx1"/>
+        </a:solidFill>
+        <a:latin typeface="+mn-lt"/>
+        <a:ea typeface="+mn-ea"/>
+        <a:cs typeface="+mn-cs"/>
+      </a:defRPr>
+    </a:lvl7pPr>
+    <a:lvl8pPr marL="3200400" algn="l" defTabSz="914400" rtl="0" eaLnBrk="1" latinLnBrk="0" hangingPunct="1">
+      <a:defRPr sz="1200" kern="1200">
+        <a:solidFill>
+          <a:schemeClr val="tx1"/>
+        </a:solidFill>
+        <a:latin typeface="+mn-lt"/>
+        <a:ea typeface="+mn-ea"/>
+        <a:cs typeface="+mn-cs"/>
+      </a:defRPr>
+    </a:lvl8pPr>
+    <a:lvl9pPr marL="3657600" algn="l" defTabSz="914400" rtl="0" eaLnBrk="1" latinLnBrk="0" hangingPunct="1">
+      <a:defRPr sz="1200" kern="1200">
+        <a:solidFill>
+          <a:schemeClr val="tx1"/>
+        </a:solidFill>
+        <a:latin typeface="+mn-lt"/>
+        <a:ea typeface="+mn-ea"/>
+        <a:cs typeface="+mn-cs"/>
+      </a:defRPr>
+    </a:lvl9pPr>
+  </p:notesStyle>
+</p:notesMaster>
+</file>
+
+<file path=ppt/notesSlides/notesSlide1.xml><?xml version="1.0" encoding="utf-8"?>
+<p:notes xmlns:a="http://schemas.openxmlformats.org/drawingml/2006/main" xmlns:r="http://schemas.openxmlformats.org/officeDocument/2006/relationships" xmlns:p="http://schemas.openxmlformats.org/presentationml/2006/main">
+  <p:cSld>
+    <p:spTree>
+      <p:nvGrpSpPr>
+        <p:cNvPr id="1" name=""/>
+        <p:cNvGrpSpPr/>
+        <p:nvPr/>
+      </p:nvGrpSpPr>
+      <p:grpSpPr/>
+      <p:sp>
+        <p:nvSpPr>
+          <p:cNvPr id="2" name="幻灯片图像占位符 1"/>
+          <p:cNvSpPr>
+            <a:spLocks noGrp="1"/>
+          </p:cNvSpPr>
+          <p:nvPr>
+            <p:ph type="sldImg" idx="2"/>
+          </p:nvPr>
+        </p:nvSpPr>
+        <p:spPr/>
+      </p:sp>
+      <p:sp>
+        <p:nvSpPr>
+          <p:cNvPr id="3" name="文本占位符 2"/>
+          <p:cNvSpPr>
+            <a:spLocks noGrp="1"/>
+          </p:cNvSpPr>
+          <p:nvPr>
+            <p:ph type="body" idx="3"/>
+          </p:nvPr>
+        </p:nvSpPr>
+        <p:spPr/>
+        <p:txBody>
+          <a:bodyPr/>
+          <a:p>
+            <a:r>
+              <a:rPr lang="en-US" altLang="zh-CN">
+                <a:sym typeface="+mn-ea"/>
+              </a:rPr>
+              <a:t>git add . &amp;&amp; git commit -m "</a:t>
+            </a:r>
+            <a:r>
+              <a:rPr lang="zh-CN" altLang="en-US">
+                <a:sym typeface="+mn-ea"/>
+              </a:rPr>
+              <a:t>改动</a:t>
+            </a:r>
+            <a:r>
+              <a:rPr lang="en-US" altLang="zh-CN">
+                <a:sym typeface="+mn-ea"/>
+              </a:rPr>
+              <a:t>about</a:t>
+            </a:r>
+            <a:r>
+              <a:rPr lang="zh-CN" altLang="en-US">
+                <a:sym typeface="+mn-ea"/>
+              </a:rPr>
+              <a:t>页面细节" &amp;&amp; </a:t>
+            </a:r>
+            <a:r>
+              <a:rPr lang="en-US" altLang="zh-CN">
+                <a:sym typeface="+mn-ea"/>
+              </a:rPr>
+              <a:t>git push origin master</a:t>
+            </a:r>
+            <a:endParaRPr lang="en-US" altLang="zh-CN"/>
+          </a:p>
+          <a:p>
+            <a:endParaRPr lang="zh-CN" altLang="en-US"/>
+          </a:p>
+        </p:txBody>
+      </p:sp>
+    </p:spTree>
+  </p:cSld>
+  <p:clrMapOvr>
+    <a:masterClrMapping/>
+  </p:clrMapOvr>
+</p:notes>
 </file>
 
 <file path=ppt/slideLayouts/slideLayout1.xml><?xml version="1.0" encoding="utf-8"?>
@@ -3197,252 +3630,268 @@
           </a:bodyPr>
           <a:p>
             <a:r>
-              <a:rPr lang="zh-CN" altLang="en-US" sz="1400"/>
+              <a:rPr lang="zh-CN" altLang="en-US" sz="1200"/>
               <a:t>新建</a:t>
             </a:r>
             <a:r>
-              <a:rPr lang="en-US" altLang="zh-CN" sz="1400"/>
+              <a:rPr lang="en-US" altLang="zh-CN" sz="1200"/>
               <a:t>md</a:t>
             </a:r>
             <a:r>
-              <a:rPr lang="zh-CN" altLang="en-US" sz="1400"/>
+              <a:rPr lang="zh-CN" altLang="en-US" sz="1200"/>
               <a:t>文件在</a:t>
             </a:r>
             <a:r>
-              <a:rPr lang="en-US" altLang="zh-CN" sz="1400"/>
+              <a:rPr lang="en-US" altLang="zh-CN" sz="1200"/>
               <a:t>posts/blog/</a:t>
             </a:r>
             <a:r>
-              <a:rPr lang="zh-CN" altLang="en-US" sz="1400"/>
+              <a:rPr lang="zh-CN" altLang="en-US" sz="1200"/>
               <a:t>或</a:t>
             </a:r>
             <a:r>
-              <a:rPr lang="en-US" altLang="zh-CN" sz="1400"/>
+              <a:rPr lang="en-US" altLang="zh-CN" sz="1200"/>
               <a:t>notes/</a:t>
             </a:r>
             <a:r>
-              <a:rPr lang="zh-CN" altLang="en-US" sz="1400"/>
+              <a:rPr lang="zh-CN" altLang="en-US" sz="1200"/>
               <a:t>或</a:t>
             </a:r>
             <a:r>
-              <a:rPr lang="en-US" altLang="zh-CN" sz="1400"/>
+              <a:rPr lang="en-US" altLang="zh-CN" sz="1200"/>
               <a:t>projects/</a:t>
             </a:r>
             <a:r>
-              <a:rPr lang="zh-CN" altLang="en-US" sz="1400"/>
+              <a:rPr lang="zh-CN" altLang="en-US" sz="1200"/>
               <a:t>文件夹，形式如下：</a:t>
             </a:r>
-            <a:endParaRPr lang="zh-CN" altLang="en-US" sz="1400"/>
+            <a:endParaRPr lang="zh-CN" altLang="en-US" sz="1200"/>
           </a:p>
           <a:p>
             <a:pPr lvl="4"/>
             <a:r>
-              <a:rPr lang="en-US" altLang="zh-CN" sz="1000"/>
+              <a:rPr lang="en-US" altLang="zh-CN" sz="900"/>
               <a:t>---</a:t>
             </a:r>
-            <a:endParaRPr lang="en-US" altLang="zh-CN" sz="1000"/>
+            <a:endParaRPr lang="en-US" altLang="zh-CN" sz="900"/>
           </a:p>
           <a:p>
             <a:pPr lvl="4"/>
             <a:r>
-              <a:rPr lang="en-US" altLang="zh-CN" sz="1000"/>
+              <a:rPr lang="en-US" altLang="zh-CN" sz="900"/>
               <a:t>title: </a:t>
             </a:r>
             <a:r>
-              <a:rPr lang="zh-CN" altLang="en-US" sz="1000"/>
+              <a:rPr lang="zh-CN" altLang="en-US" sz="900"/>
               <a:t>文章标题</a:t>
             </a:r>
-            <a:endParaRPr lang="zh-CN" altLang="en-US" sz="1000"/>
+            <a:endParaRPr lang="zh-CN" altLang="en-US" sz="900"/>
           </a:p>
           <a:p>
             <a:pPr lvl="4"/>
             <a:r>
-              <a:rPr lang="en-US" altLang="zh-CN" sz="1000"/>
+              <a:rPr lang="en-US" altLang="zh-CN" sz="900"/>
               <a:t>date: 2026-08-24</a:t>
             </a:r>
-            <a:endParaRPr lang="en-US" altLang="zh-CN" sz="1000"/>
+            <a:endParaRPr lang="en-US" altLang="zh-CN" sz="900"/>
           </a:p>
           <a:p>
             <a:pPr lvl="4"/>
             <a:r>
-              <a:rPr lang="en-US" altLang="zh-CN" sz="1000"/>
+              <a:rPr lang="en-US" altLang="zh-CN" sz="900"/>
               <a:t>excerpt: </a:t>
             </a:r>
             <a:r>
-              <a:rPr lang="zh-CN" altLang="en-US" sz="1000"/>
+              <a:rPr lang="zh-CN" altLang="en-US" sz="900"/>
               <a:t>简短描述（显示在列表页）</a:t>
             </a:r>
-            <a:endParaRPr lang="zh-CN" altLang="en-US" sz="1000"/>
+            <a:endParaRPr lang="zh-CN" altLang="en-US" sz="900"/>
           </a:p>
           <a:p>
             <a:pPr lvl="4"/>
             <a:r>
-              <a:rPr lang="en-US" altLang="zh-CN" sz="1000"/>
+              <a:rPr lang="en-US" altLang="zh-CN" sz="900"/>
               <a:t>tags: </a:t>
             </a:r>
             <a:r>
-              <a:rPr lang="zh-CN" altLang="en-US" sz="1000"/>
+              <a:rPr lang="zh-CN" altLang="en-US" sz="900"/>
               <a:t>关键词1 · 关键词2 · 关键词3  （仅 </a:t>
             </a:r>
             <a:r>
-              <a:rPr lang="en-US" altLang="zh-CN" sz="1000"/>
+              <a:rPr lang="en-US" altLang="zh-CN" sz="900"/>
               <a:t>Projects </a:t>
             </a:r>
             <a:r>
-              <a:rPr lang="zh-CN" altLang="en-US" sz="1000"/>
+              <a:rPr lang="zh-CN" altLang="en-US" sz="900"/>
               <a:t>需要）</a:t>
             </a:r>
-            <a:endParaRPr lang="zh-CN" altLang="en-US" sz="1000"/>
+            <a:endParaRPr lang="zh-CN" altLang="en-US" sz="900"/>
           </a:p>
           <a:p>
             <a:pPr lvl="4"/>
             <a:r>
-              <a:rPr lang="en-US" altLang="zh-CN" sz="1000"/>
+              <a:rPr lang="en-US" altLang="zh-CN" sz="900"/>
               <a:t>---</a:t>
             </a:r>
-            <a:endParaRPr lang="en-US" altLang="zh-CN" sz="1000"/>
+            <a:endParaRPr lang="en-US" altLang="zh-CN" sz="900"/>
           </a:p>
           <a:p>
             <a:pPr lvl="4"/>
-            <a:endParaRPr lang="en-US" altLang="zh-CN" sz="1000"/>
+            <a:endParaRPr lang="en-US" altLang="zh-CN" sz="900"/>
           </a:p>
           <a:p>
             <a:pPr lvl="4"/>
             <a:r>
-              <a:rPr lang="zh-CN" altLang="en-US" sz="1000"/>
+              <a:rPr lang="zh-CN" altLang="en-US" sz="900"/>
               <a:t># 文章标题</a:t>
             </a:r>
-            <a:endParaRPr lang="zh-CN" altLang="en-US" sz="1000"/>
+            <a:endParaRPr lang="zh-CN" altLang="en-US" sz="900"/>
           </a:p>
           <a:p>
             <a:pPr lvl="4"/>
-            <a:endParaRPr lang="en-US" altLang="zh-CN" sz="1000"/>
+            <a:endParaRPr lang="en-US" altLang="zh-CN" sz="900"/>
           </a:p>
           <a:p>
             <a:pPr lvl="4"/>
             <a:r>
-              <a:rPr lang="zh-CN" altLang="en-US" sz="1000"/>
+              <a:rPr lang="zh-CN" altLang="en-US" sz="900"/>
               <a:t>正文内容...</a:t>
             </a:r>
-            <a:endParaRPr lang="zh-CN" altLang="en-US" sz="1000"/>
-          </a:p>
-          <a:p>
-            <a:r>
-              <a:rPr lang="zh-CN" altLang="en-US" sz="1400"/>
+            <a:endParaRPr lang="zh-CN" altLang="en-US" sz="900"/>
+          </a:p>
+          <a:p>
+            <a:r>
+              <a:rPr lang="zh-CN" altLang="en-US" sz="1200"/>
               <a:t>在</a:t>
             </a:r>
             <a:r>
-              <a:rPr lang="en-US" altLang="zh-CN" sz="1400"/>
+              <a:rPr lang="en-US" altLang="zh-CN" sz="1200"/>
               <a:t>VS</a:t>
             </a:r>
             <a:r>
-              <a:rPr lang="zh-CN" altLang="en-US" sz="1400"/>
+              <a:rPr lang="zh-CN" altLang="en-US" sz="1200"/>
               <a:t>终端执行：</a:t>
             </a:r>
             <a:r>
-              <a:rPr lang="en-US" altLang="zh-CN" sz="1400"/>
+              <a:rPr lang="en-US" altLang="zh-CN" sz="1200"/>
               <a:t>python scripts/build.py</a:t>
             </a:r>
-            <a:endParaRPr lang="en-US" altLang="zh-CN" sz="1400"/>
-          </a:p>
-          <a:p>
-            <a:r>
-              <a:rPr lang="zh-CN" altLang="en-US" sz="1400"/>
+            <a:endParaRPr lang="en-US" altLang="zh-CN" sz="1200"/>
+          </a:p>
+          <a:p>
+            <a:r>
+              <a:rPr lang="zh-CN" altLang="en-US" sz="1200"/>
               <a:t>本地预览，在</a:t>
             </a:r>
             <a:r>
-              <a:rPr lang="en-US" altLang="zh-CN" sz="1400"/>
+              <a:rPr lang="en-US" altLang="zh-CN" sz="1200"/>
               <a:t>VS</a:t>
             </a:r>
             <a:r>
-              <a:rPr lang="zh-CN" altLang="en-US" sz="1400"/>
+              <a:rPr lang="zh-CN" altLang="en-US" sz="1200"/>
               <a:t>终端执行：</a:t>
             </a:r>
             <a:r>
-              <a:rPr lang="en-US" altLang="zh-CN" sz="1400"/>
+              <a:rPr lang="en-US" altLang="zh-CN" sz="1200"/>
               <a:t>python -m http.server 8000</a:t>
             </a:r>
-            <a:endParaRPr lang="en-US" altLang="zh-CN" sz="1400"/>
+            <a:endParaRPr lang="en-US" altLang="zh-CN" sz="1200"/>
           </a:p>
           <a:p>
             <a:pPr lvl="1"/>
             <a:r>
-              <a:rPr lang="zh-CN" altLang="en-US" sz="1400"/>
+              <a:rPr lang="zh-CN" altLang="en-US" sz="1200"/>
               <a:t>打开 </a:t>
             </a:r>
             <a:r>
-              <a:rPr lang="en-US" altLang="zh-CN" sz="1400"/>
+              <a:rPr lang="en-US" altLang="zh-CN" sz="1200"/>
               <a:t>http://localhost:8000 </a:t>
             </a:r>
             <a:r>
-              <a:rPr lang="zh-CN" altLang="en-US" sz="1400"/>
+              <a:rPr lang="zh-CN" altLang="en-US" sz="1200"/>
               <a:t>检查效果。</a:t>
             </a:r>
-            <a:endParaRPr lang="zh-CN" altLang="en-US" sz="1400"/>
+            <a:endParaRPr lang="zh-CN" altLang="en-US" sz="1200"/>
+          </a:p>
+          <a:p>
+            <a:pPr lvl="1"/>
+            <a:r>
+              <a:rPr lang="zh-CN" altLang="en-US" sz="1200"/>
+              <a:t>在终端</a:t>
+            </a:r>
+            <a:r>
+              <a:rPr lang="en-US" altLang="zh-CN" sz="1200"/>
+              <a:t>ctrl+C</a:t>
+            </a:r>
+            <a:r>
+              <a:rPr lang="zh-CN" altLang="en-US" sz="1200"/>
+              <a:t>强制停止。</a:t>
+            </a:r>
+            <a:endParaRPr lang="zh-CN" altLang="en-US" sz="1200"/>
           </a:p>
           <a:p>
             <a:pPr lvl="0"/>
             <a:r>
-              <a:rPr lang="zh-CN" altLang="en-US" sz="1400"/>
+              <a:rPr lang="zh-CN" altLang="en-US" sz="1200"/>
               <a:t>推送到</a:t>
             </a:r>
             <a:r>
-              <a:rPr lang="en-US" altLang="zh-CN" sz="1400"/>
+              <a:rPr lang="en-US" altLang="zh-CN" sz="1200"/>
               <a:t>github</a:t>
             </a:r>
             <a:r>
-              <a:rPr lang="zh-CN" altLang="en-US" sz="1400"/>
+              <a:rPr lang="zh-CN" altLang="en-US" sz="1200"/>
               <a:t>：可以先查看</a:t>
             </a:r>
             <a:r>
-              <a:rPr lang="en-US" altLang="zh-CN" sz="1400"/>
+              <a:rPr lang="en-US" altLang="zh-CN" sz="1200"/>
               <a:t>git status</a:t>
             </a:r>
             <a:r>
-              <a:rPr lang="zh-CN" altLang="en-US" sz="1400"/>
+              <a:rPr lang="zh-CN" altLang="en-US" sz="1200"/>
               <a:t>；然后直接</a:t>
             </a:r>
             <a:r>
-              <a:rPr lang="en-US" altLang="zh-CN" sz="1400"/>
+              <a:rPr lang="en-US" altLang="zh-CN" sz="1200"/>
               <a:t>git add . &amp;&amp; git commit -m "</a:t>
             </a:r>
             <a:r>
-              <a:rPr lang="zh-CN" altLang="en-US" sz="1400"/>
+              <a:rPr lang="zh-CN" altLang="en-US" sz="1200"/>
               <a:t>新增推文：新文章标题" &amp;&amp; </a:t>
             </a:r>
             <a:r>
-              <a:rPr lang="en-US" altLang="zh-CN" sz="1400"/>
+              <a:rPr lang="en-US" altLang="zh-CN" sz="1200"/>
               <a:t>git push origin master</a:t>
             </a:r>
-            <a:endParaRPr lang="en-US" altLang="zh-CN" sz="1400"/>
+            <a:endParaRPr lang="en-US" altLang="zh-CN" sz="1200"/>
           </a:p>
           <a:p>
             <a:pPr lvl="4"/>
             <a:r>
-              <a:rPr lang="en-US" altLang="zh-CN" sz="1000"/>
+              <a:rPr lang="en-US" altLang="zh-CN" sz="900"/>
               <a:t>git add .</a:t>
             </a:r>
-            <a:endParaRPr lang="en-US" altLang="zh-CN" sz="1000"/>
+            <a:endParaRPr lang="en-US" altLang="zh-CN" sz="900"/>
           </a:p>
           <a:p>
             <a:pPr lvl="4"/>
             <a:r>
-              <a:rPr lang="en-US" altLang="zh-CN" sz="1000"/>
+              <a:rPr lang="en-US" altLang="zh-CN" sz="900"/>
               <a:t>git commit -m "</a:t>
             </a:r>
             <a:r>
-              <a:rPr lang="zh-CN" altLang="en-US" sz="1000"/>
+              <a:rPr lang="zh-CN" altLang="en-US" sz="900"/>
               <a:t>新增推文：新文章标题"</a:t>
             </a:r>
-            <a:endParaRPr lang="zh-CN" altLang="en-US" sz="1000"/>
+            <a:endParaRPr lang="zh-CN" altLang="en-US" sz="900"/>
           </a:p>
           <a:p>
             <a:pPr lvl="4"/>
             <a:r>
-              <a:rPr lang="en-US" altLang="zh-CN" sz="1000"/>
+              <a:rPr lang="en-US" altLang="zh-CN" sz="900"/>
               <a:t>git push origin master</a:t>
             </a:r>
-            <a:endParaRPr lang="en-US" altLang="zh-CN" sz="1000"/>
+            <a:endParaRPr lang="en-US" altLang="zh-CN" sz="900"/>
           </a:p>
         </p:txBody>
       </p:sp>
@@ -3482,145 +3931,465 @@
         </p:nvSpPr>
         <p:spPr/>
         <p:txBody>
-          <a:bodyPr>
-            <a:normAutofit fontScale="90000"/>
-          </a:bodyPr>
-          <a:p>
+          <a:bodyPr/>
+          <a:p>
+            <a:endParaRPr lang="zh-CN" altLang="en-US"/>
+          </a:p>
+        </p:txBody>
+      </p:sp>
+      <p:sp>
+        <p:nvSpPr>
+          <p:cNvPr id="3" name="内容占位符 2"/>
+          <p:cNvSpPr>
+            <a:spLocks noGrp="1"/>
+          </p:cNvSpPr>
+          <p:nvPr>
+            <p:ph idx="1"/>
+            <p:custDataLst>
+              <p:tags r:id="rId2"/>
+            </p:custDataLst>
+          </p:nvPr>
+        </p:nvSpPr>
+        <p:spPr/>
+        <p:txBody>
+          <a:bodyPr/>
+          <a:p>
+            <a:r>
+              <a:rPr lang="en-US" altLang="zh-CN"/>
+              <a:t>10*10</a:t>
+            </a:r>
             <a:r>
               <a:rPr lang="zh-CN" altLang="en-US"/>
-              <a:t>如果遇到</a:t>
+              <a:t>，</a:t>
             </a:r>
             <a:r>
               <a:rPr lang="en-US" altLang="zh-CN"/>
-              <a:t>markdown</a:t>
+              <a:t>d=3</a:t>
             </a:r>
             <a:r>
               <a:rPr lang="zh-CN" altLang="en-US"/>
-              <a:t>不能用？</a:t>
-            </a:r>
-            <a:br>
+              <a:t>，圆角</a:t>
+            </a:r>
+            <a:r>
+              <a:rPr lang="en-US" altLang="zh-CN"/>
+              <a:t>2</a:t>
+            </a:r>
+            <a:endParaRPr lang="en-US" altLang="zh-CN"/>
+          </a:p>
+          <a:p>
+            <a:r>
+              <a:rPr lang="en-US" altLang="zh-CN"/>
+              <a:t>15*15</a:t>
+            </a:r>
+            <a:r>
               <a:rPr lang="zh-CN" altLang="en-US"/>
-            </a:br>
+              <a:t>，</a:t>
+            </a:r>
+            <a:r>
+              <a:rPr lang="en-US" altLang="zh-CN"/>
+              <a:t>d=6</a:t>
+            </a:r>
             <a:r>
               <a:rPr lang="zh-CN" altLang="en-US"/>
-              <a:t>可能因为回到</a:t>
+              <a:t>，圆角</a:t>
             </a:r>
             <a:r>
               <a:rPr lang="en-US" altLang="zh-CN"/>
-              <a:t>pytorch</a:t>
+              <a:t>2</a:t>
+            </a:r>
+            <a:endParaRPr lang="en-US" altLang="zh-CN"/>
+          </a:p>
+          <a:p>
+            <a:r>
+              <a:rPr lang="en-US" altLang="zh-CN"/>
+              <a:t>20*20</a:t>
             </a:r>
             <a:r>
               <a:rPr lang="zh-CN" altLang="en-US"/>
-              <a:t>老环境，要回</a:t>
+              <a:t>，</a:t>
             </a:r>
             <a:r>
               <a:rPr lang="en-US" altLang="zh-CN"/>
-              <a:t>my_env</a:t>
+              <a:t>d=6</a:t>
             </a:r>
             <a:r>
               <a:rPr lang="zh-CN" altLang="en-US"/>
-              <a:t>。</a:t>
-            </a:r>
-            <a:endParaRPr lang="zh-CN" altLang="en-US"/>
-          </a:p>
-        </p:txBody>
-      </p:sp>
-      <p:sp>
-        <p:nvSpPr>
-          <p:cNvPr id="3" name="内容占位符 2"/>
-          <p:cNvSpPr>
-            <a:spLocks noGrp="1"/>
-          </p:cNvSpPr>
-          <p:nvPr>
-            <p:ph idx="1"/>
-            <p:custDataLst>
-              <p:tags r:id="rId2"/>
-            </p:custDataLst>
-          </p:nvPr>
-        </p:nvSpPr>
-        <p:spPr/>
-        <p:txBody>
-          <a:bodyPr/>
-          <a:p>
-            <a:r>
-              <a:rPr lang="zh-CN" altLang="en-US"/>
-              <a:t>在</a:t>
+              <a:t>，圆角</a:t>
             </a:r>
             <a:r>
               <a:rPr lang="en-US" altLang="zh-CN"/>
-              <a:t>VS</a:t>
-            </a:r>
-            <a:r>
-              <a:rPr lang="zh-CN" altLang="en-US"/>
-              <a:t>终端执行：</a:t>
-            </a:r>
-            <a:r>
-              <a:rPr lang="en-US" altLang="zh-CN"/>
-              <a:t>conda deactivate</a:t>
+              <a:t>2</a:t>
             </a:r>
             <a:endParaRPr lang="en-US" altLang="zh-CN"/>
           </a:p>
-          <a:p>
-            <a:r>
-              <a:rPr lang="zh-CN" altLang="en-US"/>
-              <a:t>再执行：</a:t>
-            </a:r>
-            <a:endParaRPr lang="zh-CN" altLang="en-US"/>
-          </a:p>
-          <a:p>
-            <a:pPr lvl="2"/>
-            <a:r>
-              <a:rPr lang="en-US" altLang="zh-CN"/>
-              <a:t>source /c/Software/Anaconda/etc/profile.d/conda.sh</a:t>
-            </a:r>
-            <a:endParaRPr lang="en-US" altLang="zh-CN"/>
-          </a:p>
-          <a:p>
-            <a:pPr lvl="2"/>
-            <a:r>
-              <a:rPr lang="en-US" altLang="zh-CN"/>
-              <a:t>conda activate my_env</a:t>
-            </a:r>
-            <a:endParaRPr lang="en-US" altLang="zh-CN"/>
-          </a:p>
-          <a:p>
-            <a:pPr lvl="0"/>
-            <a:r>
-              <a:rPr lang="zh-CN" altLang="en-US"/>
-              <a:t>注意看：你的命令行前面应该变成了 (</a:t>
-            </a:r>
-            <a:r>
-              <a:rPr lang="en-US" altLang="zh-CN"/>
-              <a:t>my_env)，</a:t>
-            </a:r>
-            <a:r>
-              <a:rPr lang="zh-CN" altLang="en-US"/>
-              <a:t>千万不要变成别的！</a:t>
-            </a:r>
-            <a:endParaRPr lang="zh-CN" altLang="en-US"/>
-          </a:p>
-          <a:p>
-            <a:pPr lvl="0"/>
-            <a:r>
-              <a:rPr lang="zh-CN" altLang="en-US"/>
-              <a:t>看看有无</a:t>
-            </a:r>
-            <a:r>
-              <a:rPr lang="en-US" altLang="zh-CN"/>
-              <a:t>markdown</a:t>
-            </a:r>
-            <a:r>
-              <a:rPr lang="zh-CN" altLang="en-US"/>
-              <a:t>，执行：</a:t>
-            </a:r>
-            <a:r>
-              <a:rPr lang="en-US" altLang="zh-CN"/>
-              <a:t>python -c "import markdown; print(markdown.__version__)"</a:t>
-            </a:r>
-            <a:endParaRPr lang="en-US" altLang="zh-CN"/>
-          </a:p>
-        </p:txBody>
-      </p:sp>
+        </p:txBody>
+      </p:sp>
+      <p:grpSp>
+        <p:nvGrpSpPr>
+          <p:cNvPr id="13" name="组合 12"/>
+          <p:cNvGrpSpPr/>
+          <p:nvPr/>
+        </p:nvGrpSpPr>
+        <p:grpSpPr>
+          <a:xfrm>
+            <a:off x="3623945" y="1480820"/>
+            <a:ext cx="720090" cy="2026285"/>
+            <a:chOff x="4123" y="2776"/>
+            <a:chExt cx="1134" cy="3191"/>
+          </a:xfrm>
+        </p:grpSpPr>
+        <p:sp>
+          <p:nvSpPr>
+            <p:cNvPr id="4" name="矩形 3"/>
+            <p:cNvSpPr/>
+            <p:nvPr/>
+          </p:nvSpPr>
+          <p:spPr>
+            <a:xfrm>
+              <a:off x="4123" y="2776"/>
+              <a:ext cx="567" cy="567"/>
+            </a:xfrm>
+            <a:prstGeom prst="rect">
+              <a:avLst/>
+            </a:prstGeom>
+          </p:spPr>
+          <p:style>
+            <a:lnRef idx="2">
+              <a:schemeClr val="accent1">
+                <a:lumMod val="75000"/>
+              </a:schemeClr>
+            </a:lnRef>
+            <a:fillRef idx="1">
+              <a:schemeClr val="accent1"/>
+            </a:fillRef>
+            <a:effectRef idx="0">
+              <a:srgbClr val="FFFFFF"/>
+            </a:effectRef>
+            <a:fontRef idx="minor">
+              <a:schemeClr val="lt1"/>
+            </a:fontRef>
+          </p:style>
+          <p:txBody>
+            <a:bodyPr rtlCol="0" anchor="ctr"/>
+            <a:p>
+              <a:pPr algn="ctr"/>
+              <a:endParaRPr lang="zh-CN" altLang="en-US"/>
+            </a:p>
+          </p:txBody>
+        </p:sp>
+        <p:sp>
+          <p:nvSpPr>
+            <p:cNvPr id="6" name="椭圆 5"/>
+            <p:cNvSpPr/>
+            <p:nvPr/>
+          </p:nvSpPr>
+          <p:spPr>
+            <a:xfrm>
+              <a:off x="4208" y="2860"/>
+              <a:ext cx="397" cy="397"/>
+            </a:xfrm>
+            <a:prstGeom prst="ellipse">
+              <a:avLst/>
+            </a:prstGeom>
+          </p:spPr>
+          <p:style>
+            <a:lnRef idx="2">
+              <a:schemeClr val="accent1">
+                <a:lumMod val="75000"/>
+              </a:schemeClr>
+            </a:lnRef>
+            <a:fillRef idx="1">
+              <a:schemeClr val="accent1"/>
+            </a:fillRef>
+            <a:effectRef idx="0">
+              <a:srgbClr val="FFFFFF"/>
+            </a:effectRef>
+            <a:fontRef idx="minor">
+              <a:schemeClr val="lt1"/>
+            </a:fontRef>
+          </p:style>
+          <p:txBody>
+            <a:bodyPr rtlCol="0" anchor="ctr"/>
+            <a:p>
+              <a:pPr algn="ctr"/>
+              <a:endParaRPr lang="zh-CN" altLang="en-US"/>
+            </a:p>
+          </p:txBody>
+        </p:sp>
+        <p:sp>
+          <p:nvSpPr>
+            <p:cNvPr id="5" name="椭圆 4"/>
+            <p:cNvSpPr/>
+            <p:nvPr/>
+          </p:nvSpPr>
+          <p:spPr>
+            <a:xfrm>
+              <a:off x="4321" y="2974"/>
+              <a:ext cx="170" cy="170"/>
+            </a:xfrm>
+            <a:prstGeom prst="ellipse">
+              <a:avLst/>
+            </a:prstGeom>
+          </p:spPr>
+          <p:style>
+            <a:lnRef idx="2">
+              <a:schemeClr val="accent1">
+                <a:lumMod val="75000"/>
+              </a:schemeClr>
+            </a:lnRef>
+            <a:fillRef idx="1">
+              <a:schemeClr val="accent1"/>
+            </a:fillRef>
+            <a:effectRef idx="0">
+              <a:srgbClr val="FFFFFF"/>
+            </a:effectRef>
+            <a:fontRef idx="minor">
+              <a:schemeClr val="lt1"/>
+            </a:fontRef>
+          </p:style>
+          <p:txBody>
+            <a:bodyPr rtlCol="0" anchor="ctr"/>
+            <a:p>
+              <a:pPr algn="ctr"/>
+              <a:endParaRPr lang="zh-CN" altLang="en-US"/>
+            </a:p>
+          </p:txBody>
+        </p:sp>
+        <p:sp>
+          <p:nvSpPr>
+            <p:cNvPr id="7" name="矩形 6"/>
+            <p:cNvSpPr/>
+            <p:nvPr/>
+          </p:nvSpPr>
+          <p:spPr>
+            <a:xfrm>
+              <a:off x="4123" y="3701"/>
+              <a:ext cx="850" cy="850"/>
+            </a:xfrm>
+            <a:prstGeom prst="rect">
+              <a:avLst/>
+            </a:prstGeom>
+          </p:spPr>
+          <p:style>
+            <a:lnRef idx="2">
+              <a:schemeClr val="accent1">
+                <a:lumMod val="75000"/>
+              </a:schemeClr>
+            </a:lnRef>
+            <a:fillRef idx="1">
+              <a:schemeClr val="accent1"/>
+            </a:fillRef>
+            <a:effectRef idx="0">
+              <a:srgbClr val="FFFFFF"/>
+            </a:effectRef>
+            <a:fontRef idx="minor">
+              <a:schemeClr val="lt1"/>
+            </a:fontRef>
+          </p:style>
+          <p:txBody>
+            <a:bodyPr rtlCol="0" anchor="ctr"/>
+            <a:p>
+              <a:pPr algn="ctr"/>
+              <a:endParaRPr lang="zh-CN" altLang="en-US"/>
+            </a:p>
+          </p:txBody>
+        </p:sp>
+        <p:sp>
+          <p:nvSpPr>
+            <p:cNvPr id="8" name="椭圆 7"/>
+            <p:cNvSpPr/>
+            <p:nvPr/>
+          </p:nvSpPr>
+          <p:spPr>
+            <a:xfrm>
+              <a:off x="4265" y="3843"/>
+              <a:ext cx="567" cy="567"/>
+            </a:xfrm>
+            <a:prstGeom prst="ellipse">
+              <a:avLst/>
+            </a:prstGeom>
+          </p:spPr>
+          <p:style>
+            <a:lnRef idx="2">
+              <a:schemeClr val="accent1">
+                <a:lumMod val="75000"/>
+              </a:schemeClr>
+            </a:lnRef>
+            <a:fillRef idx="1">
+              <a:schemeClr val="accent1"/>
+            </a:fillRef>
+            <a:effectRef idx="0">
+              <a:srgbClr val="FFFFFF"/>
+            </a:effectRef>
+            <a:fontRef idx="minor">
+              <a:schemeClr val="lt1"/>
+            </a:fontRef>
+          </p:style>
+          <p:txBody>
+            <a:bodyPr rtlCol="0" anchor="ctr"/>
+            <a:p>
+              <a:pPr algn="ctr"/>
+              <a:endParaRPr lang="zh-CN" altLang="en-US"/>
+            </a:p>
+          </p:txBody>
+        </p:sp>
+        <p:sp>
+          <p:nvSpPr>
+            <p:cNvPr id="9" name="椭圆 8"/>
+            <p:cNvSpPr/>
+            <p:nvPr/>
+          </p:nvSpPr>
+          <p:spPr>
+            <a:xfrm>
+              <a:off x="4378" y="3957"/>
+              <a:ext cx="340" cy="340"/>
+            </a:xfrm>
+            <a:prstGeom prst="ellipse">
+              <a:avLst/>
+            </a:prstGeom>
+          </p:spPr>
+          <p:style>
+            <a:lnRef idx="2">
+              <a:schemeClr val="accent1">
+                <a:lumMod val="75000"/>
+              </a:schemeClr>
+            </a:lnRef>
+            <a:fillRef idx="1">
+              <a:schemeClr val="accent1"/>
+            </a:fillRef>
+            <a:effectRef idx="0">
+              <a:srgbClr val="FFFFFF"/>
+            </a:effectRef>
+            <a:fontRef idx="minor">
+              <a:schemeClr val="lt1"/>
+            </a:fontRef>
+          </p:style>
+          <p:txBody>
+            <a:bodyPr rtlCol="0" anchor="ctr"/>
+            <a:p>
+              <a:pPr algn="ctr"/>
+              <a:endParaRPr lang="zh-CN" altLang="en-US"/>
+            </a:p>
+          </p:txBody>
+        </p:sp>
+        <p:sp>
+          <p:nvSpPr>
+            <p:cNvPr id="10" name="矩形 9"/>
+            <p:cNvSpPr/>
+            <p:nvPr/>
+          </p:nvSpPr>
+          <p:spPr>
+            <a:xfrm>
+              <a:off x="4123" y="4833"/>
+              <a:ext cx="1134" cy="1134"/>
+            </a:xfrm>
+            <a:prstGeom prst="rect">
+              <a:avLst/>
+            </a:prstGeom>
+          </p:spPr>
+          <p:style>
+            <a:lnRef idx="2">
+              <a:schemeClr val="accent1">
+                <a:lumMod val="75000"/>
+              </a:schemeClr>
+            </a:lnRef>
+            <a:fillRef idx="1">
+              <a:schemeClr val="accent1"/>
+            </a:fillRef>
+            <a:effectRef idx="0">
+              <a:srgbClr val="FFFFFF"/>
+            </a:effectRef>
+            <a:fontRef idx="minor">
+              <a:schemeClr val="lt1"/>
+            </a:fontRef>
+          </p:style>
+          <p:txBody>
+            <a:bodyPr rtlCol="0" anchor="ctr"/>
+            <a:p>
+              <a:pPr algn="ctr"/>
+              <a:endParaRPr lang="zh-CN" altLang="en-US"/>
+            </a:p>
+          </p:txBody>
+        </p:sp>
+        <p:sp>
+          <p:nvSpPr>
+            <p:cNvPr id="11" name="椭圆 10"/>
+            <p:cNvSpPr/>
+            <p:nvPr/>
+          </p:nvSpPr>
+          <p:spPr>
+            <a:xfrm>
+              <a:off x="4407" y="5116"/>
+              <a:ext cx="567" cy="567"/>
+            </a:xfrm>
+            <a:prstGeom prst="ellipse">
+              <a:avLst/>
+            </a:prstGeom>
+          </p:spPr>
+          <p:style>
+            <a:lnRef idx="2">
+              <a:schemeClr val="accent1">
+                <a:lumMod val="75000"/>
+              </a:schemeClr>
+            </a:lnRef>
+            <a:fillRef idx="1">
+              <a:schemeClr val="accent1"/>
+            </a:fillRef>
+            <a:effectRef idx="0">
+              <a:srgbClr val="FFFFFF"/>
+            </a:effectRef>
+            <a:fontRef idx="minor">
+              <a:schemeClr val="lt1"/>
+            </a:fontRef>
+          </p:style>
+          <p:txBody>
+            <a:bodyPr rtlCol="0" anchor="ctr"/>
+            <a:p>
+              <a:pPr algn="ctr"/>
+              <a:endParaRPr lang="zh-CN" altLang="en-US"/>
+            </a:p>
+          </p:txBody>
+        </p:sp>
+        <p:sp>
+          <p:nvSpPr>
+            <p:cNvPr id="12" name="椭圆 11"/>
+            <p:cNvSpPr/>
+            <p:nvPr/>
+          </p:nvSpPr>
+          <p:spPr>
+            <a:xfrm>
+              <a:off x="4520" y="5230"/>
+              <a:ext cx="340" cy="340"/>
+            </a:xfrm>
+            <a:prstGeom prst="ellipse">
+              <a:avLst/>
+            </a:prstGeom>
+          </p:spPr>
+          <p:style>
+            <a:lnRef idx="2">
+              <a:schemeClr val="accent1">
+                <a:lumMod val="75000"/>
+              </a:schemeClr>
+            </a:lnRef>
+            <a:fillRef idx="1">
+              <a:schemeClr val="accent1"/>
+            </a:fillRef>
+            <a:effectRef idx="0">
+              <a:srgbClr val="FFFFFF"/>
+            </a:effectRef>
+            <a:fontRef idx="minor">
+              <a:schemeClr val="lt1"/>
+            </a:fontRef>
+          </p:style>
+          <p:txBody>
+            <a:bodyPr rtlCol="0" anchor="ctr"/>
+            <a:p>
+              <a:pPr algn="ctr"/>
+              <a:endParaRPr lang="zh-CN" altLang="en-US"/>
+            </a:p>
+          </p:txBody>
+        </p:sp>
+      </p:grpSp>
     </p:spTree>
     <p:custDataLst>
       <p:tags r:id="rId3"/>
@@ -3632,6 +4401,244 @@
 </p:sld>
 </file>
 
+<file path=ppt/slides/slide4.xml><?xml version="1.0" encoding="utf-8"?>
+<p:sld xmlns:a="http://schemas.openxmlformats.org/drawingml/2006/main" xmlns:r="http://schemas.openxmlformats.org/officeDocument/2006/relationships" xmlns:p="http://schemas.openxmlformats.org/presentationml/2006/main">
+  <p:cSld>
+    <p:spTree>
+      <p:nvGrpSpPr>
+        <p:cNvPr id="1" name=""/>
+        <p:cNvGrpSpPr/>
+        <p:nvPr/>
+      </p:nvGrpSpPr>
+      <p:grpSpPr/>
+      <p:sp>
+        <p:nvSpPr>
+          <p:cNvPr id="2" name="标题 1"/>
+          <p:cNvSpPr>
+            <a:spLocks noGrp="1"/>
+          </p:cNvSpPr>
+          <p:nvPr>
+            <p:ph type="title"/>
+            <p:custDataLst>
+              <p:tags r:id="rId1"/>
+            </p:custDataLst>
+          </p:nvPr>
+        </p:nvSpPr>
+        <p:spPr/>
+        <p:txBody>
+          <a:bodyPr/>
+          <a:p>
+            <a:endParaRPr lang="zh-CN" altLang="en-US"/>
+          </a:p>
+        </p:txBody>
+      </p:sp>
+      <p:sp>
+        <p:nvSpPr>
+          <p:cNvPr id="3" name="内容占位符 2"/>
+          <p:cNvSpPr>
+            <a:spLocks noGrp="1"/>
+          </p:cNvSpPr>
+          <p:nvPr>
+            <p:ph idx="1"/>
+            <p:custDataLst>
+              <p:tags r:id="rId2"/>
+            </p:custDataLst>
+          </p:nvPr>
+        </p:nvSpPr>
+        <p:spPr/>
+        <p:txBody>
+          <a:bodyPr/>
+          <a:p>
+            <a:endParaRPr lang="zh-CN" altLang="en-US"/>
+          </a:p>
+        </p:txBody>
+      </p:sp>
+    </p:spTree>
+    <p:custDataLst>
+      <p:tags r:id="rId3"/>
+    </p:custDataLst>
+  </p:cSld>
+  <p:clrMapOvr>
+    <a:masterClrMapping/>
+  </p:clrMapOvr>
+</p:sld>
+</file>
+
+<file path=ppt/slides/slide5.xml><?xml version="1.0" encoding="utf-8"?>
+<p:sld xmlns:a="http://schemas.openxmlformats.org/drawingml/2006/main" xmlns:r="http://schemas.openxmlformats.org/officeDocument/2006/relationships" xmlns:p="http://schemas.openxmlformats.org/presentationml/2006/main">
+  <p:cSld>
+    <p:spTree>
+      <p:nvGrpSpPr>
+        <p:cNvPr id="1" name=""/>
+        <p:cNvGrpSpPr/>
+        <p:nvPr/>
+      </p:nvGrpSpPr>
+      <p:grpSpPr/>
+      <p:sp>
+        <p:nvSpPr>
+          <p:cNvPr id="2" name="标题 1"/>
+          <p:cNvSpPr>
+            <a:spLocks noGrp="1"/>
+          </p:cNvSpPr>
+          <p:nvPr>
+            <p:ph type="title"/>
+            <p:custDataLst>
+              <p:tags r:id="rId1"/>
+            </p:custDataLst>
+          </p:nvPr>
+        </p:nvSpPr>
+        <p:spPr/>
+        <p:txBody>
+          <a:bodyPr>
+            <a:normAutofit fontScale="90000"/>
+          </a:bodyPr>
+          <a:p>
+            <a:r>
+              <a:rPr lang="zh-CN" altLang="en-US"/>
+              <a:t>如果遇到</a:t>
+            </a:r>
+            <a:r>
+              <a:rPr lang="en-US" altLang="zh-CN"/>
+              <a:t>markdown</a:t>
+            </a:r>
+            <a:r>
+              <a:rPr lang="zh-CN" altLang="en-US"/>
+              <a:t>不能用？</a:t>
+            </a:r>
+            <a:br>
+              <a:rPr lang="zh-CN" altLang="en-US"/>
+            </a:br>
+            <a:r>
+              <a:rPr lang="zh-CN" altLang="en-US"/>
+              <a:t>可能因为回到</a:t>
+            </a:r>
+            <a:r>
+              <a:rPr lang="en-US" altLang="zh-CN"/>
+              <a:t>pytorch</a:t>
+            </a:r>
+            <a:r>
+              <a:rPr lang="zh-CN" altLang="en-US"/>
+              <a:t>老环境，要回</a:t>
+            </a:r>
+            <a:r>
+              <a:rPr lang="en-US" altLang="zh-CN"/>
+              <a:t>my_env</a:t>
+            </a:r>
+            <a:r>
+              <a:rPr lang="zh-CN" altLang="en-US"/>
+              <a:t>。</a:t>
+            </a:r>
+            <a:endParaRPr lang="zh-CN" altLang="en-US"/>
+          </a:p>
+        </p:txBody>
+      </p:sp>
+      <p:sp>
+        <p:nvSpPr>
+          <p:cNvPr id="3" name="内容占位符 2"/>
+          <p:cNvSpPr>
+            <a:spLocks noGrp="1"/>
+          </p:cNvSpPr>
+          <p:nvPr>
+            <p:ph idx="1"/>
+            <p:custDataLst>
+              <p:tags r:id="rId2"/>
+            </p:custDataLst>
+          </p:nvPr>
+        </p:nvSpPr>
+        <p:spPr/>
+        <p:txBody>
+          <a:bodyPr/>
+          <a:p>
+            <a:r>
+              <a:rPr lang="zh-CN" altLang="en-US"/>
+              <a:t>在</a:t>
+            </a:r>
+            <a:r>
+              <a:rPr lang="en-US" altLang="zh-CN"/>
+              <a:t>VS</a:t>
+            </a:r>
+            <a:r>
+              <a:rPr lang="zh-CN" altLang="en-US"/>
+              <a:t>终端执行：</a:t>
+            </a:r>
+            <a:r>
+              <a:rPr lang="en-US" altLang="zh-CN"/>
+              <a:t>conda deactivate</a:t>
+            </a:r>
+            <a:endParaRPr lang="en-US" altLang="zh-CN"/>
+          </a:p>
+          <a:p>
+            <a:r>
+              <a:rPr lang="zh-CN" altLang="en-US"/>
+              <a:t>再执行：</a:t>
+            </a:r>
+            <a:endParaRPr lang="zh-CN" altLang="en-US"/>
+          </a:p>
+          <a:p>
+            <a:pPr lvl="2"/>
+            <a:r>
+              <a:rPr lang="en-US" altLang="zh-CN"/>
+              <a:t>source /c/Software/Anaconda/etc/profile.d/conda.sh</a:t>
+            </a:r>
+            <a:endParaRPr lang="en-US" altLang="zh-CN"/>
+          </a:p>
+          <a:p>
+            <a:pPr lvl="2"/>
+            <a:r>
+              <a:rPr lang="en-US" altLang="zh-CN"/>
+              <a:t>conda activate my_env</a:t>
+            </a:r>
+            <a:endParaRPr lang="en-US" altLang="zh-CN"/>
+          </a:p>
+          <a:p>
+            <a:pPr lvl="0"/>
+            <a:r>
+              <a:rPr lang="zh-CN" altLang="en-US"/>
+              <a:t>注意看：你的命令行前面应该变成了 (</a:t>
+            </a:r>
+            <a:r>
+              <a:rPr lang="en-US" altLang="zh-CN"/>
+              <a:t>my_env)，</a:t>
+            </a:r>
+            <a:r>
+              <a:rPr lang="zh-CN" altLang="en-US"/>
+              <a:t>千万不要变成别的！</a:t>
+            </a:r>
+            <a:endParaRPr lang="zh-CN" altLang="en-US"/>
+          </a:p>
+          <a:p>
+            <a:pPr lvl="0"/>
+            <a:r>
+              <a:rPr lang="zh-CN" altLang="en-US"/>
+              <a:t>看看有无</a:t>
+            </a:r>
+            <a:r>
+              <a:rPr lang="en-US" altLang="zh-CN"/>
+              <a:t>markdown</a:t>
+            </a:r>
+            <a:r>
+              <a:rPr lang="zh-CN" altLang="en-US"/>
+              <a:t>，执行：</a:t>
+            </a:r>
+            <a:r>
+              <a:rPr lang="en-US" altLang="zh-CN"/>
+              <a:t>python -c "import markdown; print(markdown.__version__)"</a:t>
+            </a:r>
+            <a:endParaRPr lang="en-US" altLang="zh-CN"/>
+          </a:p>
+        </p:txBody>
+      </p:sp>
+    </p:spTree>
+    <p:custDataLst>
+      <p:tags r:id="rId3"/>
+    </p:custDataLst>
+  </p:cSld>
+  <p:clrMapOvr>
+    <a:masterClrMapping/>
+  </p:clrMapOvr>
+</p:sld>
+</file>
+
 <file path=ppt/tags/tag1.xml><?xml version="1.0" encoding="utf-8"?>
 <p:tagLst xmlns:p="http://schemas.openxmlformats.org/presentationml/2006/main">
   <p:tag name="KSO_WM_UNIT_HIGHLIGHT" val="0"/>
@@ -4543,6 +5550,74 @@
 </file>
 
 <file path=ppt/tags/tag71.xml><?xml version="1.0" encoding="utf-8"?>
+<p:tagLst xmlns:p="http://schemas.openxmlformats.org/presentationml/2006/main">
+  <p:tag name="KSO_WM_BEAUTIFY_FLAG" val="#wm#"/>
+  <p:tag name="KSO_WM_TEMPLATE_CATEGORY" val="custom"/>
+  <p:tag name="KSO_WM_TEMPLATE_INDEX" val="20205081"/>
+</p:tagLst>
+</file>
+
+<file path=ppt/tags/tag72.xml><?xml version="1.0" encoding="utf-8"?>
+<p:tagLst xmlns:p="http://schemas.openxmlformats.org/presentationml/2006/main">
+  <p:tag name="KSO_WM_UNIT_HIGHLIGHT" val="0"/>
+  <p:tag name="KSO_WM_UNIT_COMPATIBLE" val="0"/>
+  <p:tag name="KSO_WM_UNIT_DIAGRAM_ISNUMVISUAL" val="0"/>
+  <p:tag name="KSO_WM_UNIT_DIAGRAM_ISREFERUNIT" val="0"/>
+  <p:tag name="KSO_WM_UNIT_ID" val="_2**"/>
+  <p:tag name="KSO_WM_UNIT_LAYERLEVEL" val="1"/>
+  <p:tag name="KSO_WM_TAG_VERSION" val="1.0"/>
+  <p:tag name="KSO_WM_BEAUTIFY_FLAG" val="#wm#"/>
+</p:tagLst>
+</file>
+
+<file path=ppt/tags/tag73.xml><?xml version="1.0" encoding="utf-8"?>
+<p:tagLst xmlns:p="http://schemas.openxmlformats.org/presentationml/2006/main">
+  <p:tag name="KSO_WM_UNIT_HIGHLIGHT" val="0"/>
+  <p:tag name="KSO_WM_UNIT_COMPATIBLE" val="0"/>
+  <p:tag name="KSO_WM_UNIT_DIAGRAM_ISNUMVISUAL" val="0"/>
+  <p:tag name="KSO_WM_UNIT_DIAGRAM_ISREFERUNIT" val="0"/>
+  <p:tag name="KSO_WM_UNIT_ID" val="_2**"/>
+  <p:tag name="KSO_WM_UNIT_LAYERLEVEL" val="1"/>
+  <p:tag name="KSO_WM_TAG_VERSION" val="1.0"/>
+  <p:tag name="KSO_WM_BEAUTIFY_FLAG" val="#wm#"/>
+</p:tagLst>
+</file>
+
+<file path=ppt/tags/tag74.xml><?xml version="1.0" encoding="utf-8"?>
+<p:tagLst xmlns:p="http://schemas.openxmlformats.org/presentationml/2006/main">
+  <p:tag name="KSO_WM_BEAUTIFY_FLAG" val="#wm#"/>
+  <p:tag name="KSO_WM_TEMPLATE_CATEGORY" val="custom"/>
+  <p:tag name="KSO_WM_TEMPLATE_INDEX" val="20205081"/>
+</p:tagLst>
+</file>
+
+<file path=ppt/tags/tag75.xml><?xml version="1.0" encoding="utf-8"?>
+<p:tagLst xmlns:p="http://schemas.openxmlformats.org/presentationml/2006/main">
+  <p:tag name="KSO_WM_UNIT_HIGHLIGHT" val="0"/>
+  <p:tag name="KSO_WM_UNIT_COMPATIBLE" val="0"/>
+  <p:tag name="KSO_WM_UNIT_DIAGRAM_ISNUMVISUAL" val="0"/>
+  <p:tag name="KSO_WM_UNIT_DIAGRAM_ISREFERUNIT" val="0"/>
+  <p:tag name="KSO_WM_UNIT_ID" val="_2**"/>
+  <p:tag name="KSO_WM_UNIT_LAYERLEVEL" val="1"/>
+  <p:tag name="KSO_WM_TAG_VERSION" val="1.0"/>
+  <p:tag name="KSO_WM_BEAUTIFY_FLAG" val="#wm#"/>
+</p:tagLst>
+</file>
+
+<file path=ppt/tags/tag76.xml><?xml version="1.0" encoding="utf-8"?>
+<p:tagLst xmlns:p="http://schemas.openxmlformats.org/presentationml/2006/main">
+  <p:tag name="KSO_WM_UNIT_HIGHLIGHT" val="0"/>
+  <p:tag name="KSO_WM_UNIT_COMPATIBLE" val="0"/>
+  <p:tag name="KSO_WM_UNIT_DIAGRAM_ISNUMVISUAL" val="0"/>
+  <p:tag name="KSO_WM_UNIT_DIAGRAM_ISREFERUNIT" val="0"/>
+  <p:tag name="KSO_WM_UNIT_ID" val="_2**"/>
+  <p:tag name="KSO_WM_UNIT_LAYERLEVEL" val="1"/>
+  <p:tag name="KSO_WM_TAG_VERSION" val="1.0"/>
+  <p:tag name="KSO_WM_BEAUTIFY_FLAG" val="#wm#"/>
+</p:tagLst>
+</file>
+
+<file path=ppt/tags/tag77.xml><?xml version="1.0" encoding="utf-8"?>
 <p:tagLst xmlns:p="http://schemas.openxmlformats.org/presentationml/2006/main">
   <p:tag name="KSO_WM_BEAUTIFY_FLAG" val="#wm#"/>
   <p:tag name="KSO_WM_TEMPLATE_CATEGORY" val="custom"/>
@@ -4765,4 +5840,263 @@
     </a:ext>
   </a:extLst>
 </a:theme>
+</file>
+
+<file path=ppt/theme/theme2.xml><?xml version="1.0" encoding="utf-8"?>
+<a:theme xmlns:a="http://schemas.openxmlformats.org/drawingml/2006/main" name="Office 主题">
+  <a:themeElements>
+    <a:clrScheme name="Office">
+      <a:dk1>
+        <a:sysClr val="windowText" lastClr="000000"/>
+      </a:dk1>
+      <a:lt1>
+        <a:sysClr val="window" lastClr="FFFFFF"/>
+      </a:lt1>
+      <a:dk2>
+        <a:srgbClr val="44546A"/>
+      </a:dk2>
+      <a:lt2>
+        <a:srgbClr val="E7E6E6"/>
+      </a:lt2>
+      <a:accent1>
+        <a:srgbClr val="5B9BD5"/>
+      </a:accent1>
+      <a:accent2>
+        <a:srgbClr val="ED7D31"/>
+      </a:accent2>
+      <a:accent3>
+        <a:srgbClr val="A5A5A5"/>
+      </a:accent3>
+      <a:accent4>
+        <a:srgbClr val="FFC000"/>
+      </a:accent4>
+      <a:accent5>
+        <a:srgbClr val="4472C4"/>
+      </a:accent5>
+      <a:accent6>
+        <a:srgbClr val="70AD47"/>
+      </a:accent6>
+      <a:hlink>
+        <a:srgbClr val="0563C1"/>
+      </a:hlink>
+      <a:folHlink>
+        <a:srgbClr val="954F72"/>
+      </a:folHlink>
+    </a:clrScheme>
+    <a:fontScheme name="Office">
+      <a:majorFont>
+        <a:latin typeface="Calibri Light"/>
+        <a:ea typeface=""/>
+        <a:cs typeface=""/>
+        <a:font script="Jpan" typeface="ＭＳ Ｐゴシック"/>
+        <a:font script="Hang" typeface="맑은 고딕"/>
+        <a:font script="Hans" typeface="宋体"/>
+        <a:font script="Hant" typeface="新細明體"/>
+        <a:font script="Arab" typeface="Times New Roman"/>
+        <a:font script="Hebr" typeface="Times New Roman"/>
+        <a:font script="Thai" typeface="Angsana New"/>
+        <a:font script="Ethi" typeface="Nyala"/>
+        <a:font script="Beng" typeface="Vrinda"/>
+        <a:font script="Gujr" typeface="Shruti"/>
+        <a:font script="Khmr" typeface="MoolBoran"/>
+        <a:font script="Knda" typeface="Tunga"/>
+        <a:font script="Guru" typeface="Raavi"/>
+        <a:font script="Cans" typeface="Euphemia"/>
+        <a:font script="Cher" typeface="Plantagenet Cherokee"/>
+        <a:font script="Yiii" typeface="Microsoft Yi Baiti"/>
+        <a:font script="Tibt" typeface="Microsoft Himalaya"/>
+        <a:font script="Thaa" typeface="MV Boli"/>
+        <a:font script="Deva" typeface="Mangal"/>
+        <a:font script="Telu" typeface="Gautami"/>
+        <a:font script="Taml" typeface="Latha"/>
+        <a:font script="Syrc" typeface="Estrangelo Edessa"/>
+        <a:font script="Orya" typeface="Kalinga"/>
+        <a:font script="Mlym" typeface="Kartika"/>
+        <a:font script="Laoo" typeface="DokChampa"/>
+        <a:font script="Sinh" typeface="Iskoola Pota"/>
+        <a:font script="Mong" typeface="Mongolian Baiti"/>
+        <a:font script="Viet" typeface="Times New Roman"/>
+        <a:font script="Uigh" typeface="Microsoft Uighur"/>
+        <a:font script="Geor" typeface="Sylfaen"/>
+      </a:majorFont>
+      <a:minorFont>
+        <a:latin typeface="Calibri"/>
+        <a:ea typeface=""/>
+        <a:cs typeface=""/>
+        <a:font script="Jpan" typeface="ＭＳ Ｐゴシック"/>
+        <a:font script="Hang" typeface="맑은 고딕"/>
+        <a:font script="Hans" typeface="宋体"/>
+        <a:font script="Hant" typeface="新細明體"/>
+        <a:font script="Arab" typeface="Arial"/>
+        <a:font script="Hebr" typeface="Arial"/>
+        <a:font script="Thai" typeface="Cordia New"/>
+        <a:font script="Ethi" typeface="Nyala"/>
+        <a:font script="Beng" typeface="Vrinda"/>
+        <a:font script="Gujr" typeface="Shruti"/>
+        <a:font script="Khmr" typeface="DaunPenh"/>
+        <a:font script="Knda" typeface="Tunga"/>
+        <a:font script="Guru" typeface="Raavi"/>
+        <a:font script="Cans" typeface="Euphemia"/>
+        <a:font script="Cher" typeface="Plantagenet Cherokee"/>
+        <a:font script="Yiii" typeface="Microsoft Yi Baiti"/>
+        <a:font script="Tibt" typeface="Microsoft Himalaya"/>
+        <a:font script="Thaa" typeface="MV Boli"/>
+        <a:font script="Deva" typeface="Mangal"/>
+        <a:font script="Telu" typeface="Gautami"/>
+        <a:font script="Taml" typeface="Latha"/>
+        <a:font script="Syrc" typeface="Estrangelo Edessa"/>
+        <a:font script="Orya" typeface="Kalinga"/>
+        <a:font script="Mlym" typeface="Kartika"/>
+        <a:font script="Laoo" typeface="DokChampa"/>
+        <a:font script="Sinh" typeface="Iskoola Pota"/>
+        <a:font script="Mong" typeface="Mongolian Baiti"/>
+        <a:font script="Viet" typeface="Arial"/>
+        <a:font script="Uigh" typeface="Microsoft Uighur"/>
+        <a:font script="Geor" typeface="Sylfaen"/>
+      </a:minorFont>
+    </a:fontScheme>
+    <a:fmtScheme name="Office">
+      <a:fillStyleLst>
+        <a:solidFill>
+          <a:schemeClr val="phClr"/>
+        </a:solidFill>
+        <a:gradFill rotWithShape="1">
+          <a:gsLst>
+            <a:gs pos="0">
+              <a:schemeClr val="phClr">
+                <a:lumMod val="110000"/>
+                <a:satMod val="105000"/>
+                <a:tint val="67000"/>
+              </a:schemeClr>
+            </a:gs>
+            <a:gs pos="50000">
+              <a:schemeClr val="phClr">
+                <a:lumMod val="105000"/>
+                <a:satMod val="103000"/>
+                <a:tint val="73000"/>
+              </a:schemeClr>
+            </a:gs>
+            <a:gs pos="100000">
+              <a:schemeClr val="phClr">
+                <a:lumMod val="105000"/>
+                <a:satMod val="109000"/>
+                <a:tint val="81000"/>
+              </a:schemeClr>
+            </a:gs>
+          </a:gsLst>
+          <a:lin ang="5400000" scaled="0"/>
+        </a:gradFill>
+        <a:gradFill rotWithShape="1">
+          <a:gsLst>
+            <a:gs pos="0">
+              <a:schemeClr val="phClr">
+                <a:satMod val="103000"/>
+                <a:lumMod val="102000"/>
+                <a:tint val="94000"/>
+              </a:schemeClr>
+            </a:gs>
+            <a:gs pos="50000">
+              <a:schemeClr val="phClr">
+                <a:satMod val="110000"/>
+                <a:lumMod val="100000"/>
+                <a:shade val="100000"/>
+              </a:schemeClr>
+            </a:gs>
+            <a:gs pos="100000">
+              <a:schemeClr val="phClr">
+                <a:lumMod val="99000"/>
+                <a:satMod val="120000"/>
+                <a:shade val="78000"/>
+              </a:schemeClr>
+            </a:gs>
+          </a:gsLst>
+          <a:lin ang="5400000" scaled="0"/>
+        </a:gradFill>
+      </a:fillStyleLst>
+      <a:lnStyleLst>
+        <a:ln w="6350" cap="flat" cmpd="sng" algn="ctr">
+          <a:solidFill>
+            <a:schemeClr val="phClr"/>
+          </a:solidFill>
+          <a:prstDash val="solid"/>
+          <a:miter lim="800000"/>
+        </a:ln>
+        <a:ln w="12700" cap="flat" cmpd="sng" algn="ctr">
+          <a:solidFill>
+            <a:schemeClr val="phClr"/>
+          </a:solidFill>
+          <a:prstDash val="solid"/>
+          <a:miter lim="800000"/>
+        </a:ln>
+        <a:ln w="19050" cap="flat" cmpd="sng" algn="ctr">
+          <a:solidFill>
+            <a:schemeClr val="phClr"/>
+          </a:solidFill>
+          <a:prstDash val="solid"/>
+          <a:miter lim="800000"/>
+        </a:ln>
+      </a:lnStyleLst>
+      <a:effectStyleLst>
+        <a:effectStyle>
+          <a:effectLst/>
+        </a:effectStyle>
+        <a:effectStyle>
+          <a:effectLst/>
+        </a:effectStyle>
+        <a:effectStyle>
+          <a:effectLst>
+            <a:outerShdw blurRad="57150" dist="19050" dir="5400000" algn="ctr" rotWithShape="0">
+              <a:srgbClr val="000000">
+                <a:alpha val="63000"/>
+              </a:srgbClr>
+            </a:outerShdw>
+          </a:effectLst>
+        </a:effectStyle>
+      </a:effectStyleLst>
+      <a:bgFillStyleLst>
+        <a:solidFill>
+          <a:schemeClr val="phClr"/>
+        </a:solidFill>
+        <a:solidFill>
+          <a:schemeClr val="phClr">
+            <a:tint val="95000"/>
+            <a:satMod val="170000"/>
+          </a:schemeClr>
+        </a:solidFill>
+        <a:gradFill rotWithShape="1">
+          <a:gsLst>
+            <a:gs pos="0">
+              <a:schemeClr val="phClr">
+                <a:tint val="93000"/>
+                <a:satMod val="150000"/>
+                <a:shade val="98000"/>
+                <a:lumMod val="102000"/>
+              </a:schemeClr>
+            </a:gs>
+            <a:gs pos="50000">
+              <a:schemeClr val="phClr">
+                <a:tint val="98000"/>
+                <a:satMod val="130000"/>
+                <a:shade val="90000"/>
+                <a:lumMod val="103000"/>
+              </a:schemeClr>
+            </a:gs>
+            <a:gs pos="100000">
+              <a:schemeClr val="phClr">
+                <a:shade val="63000"/>
+                <a:satMod val="120000"/>
+              </a:schemeClr>
+            </a:gs>
+          </a:gsLst>
+          <a:lin ang="5400000" scaled="0"/>
+        </a:gradFill>
+      </a:bgFillStyleLst>
+    </a:fmtScheme>
+  </a:themeElements>
+  <a:extLst>
+    <a:ext uri="{05A4C25C-085E-4340-85A3-A5531E510DB2}">
+      <thm15:themeFamily xmlns:thm15="http://schemas.microsoft.com/office/thememl/2012/main" name="Office Theme" id="{62F939B6-93AF-4DB8-9C6B-D6C7DFDC589F}" vid="{4A3C46E8-61CC-4603-A589-7422A47A8E4A}"/>
+    </a:ext>
+  </a:extLst>
+</a:theme>
 </file>
--- a/MyWebsite说明书.pptx
+++ b/MyWebsite说明书.pptx
@@ -12,7 +12,8 @@
     <p:sldId id="257" r:id="rId4"/>
     <p:sldId id="259" r:id="rId6"/>
     <p:sldId id="260" r:id="rId7"/>
-    <p:sldId id="258" r:id="rId8"/>
+    <p:sldId id="261" r:id="rId8"/>
+    <p:sldId id="258" r:id="rId9"/>
   </p:sldIdLst>
   <p:sldSz cx="12192000" cy="6858000"/>
   <p:notesSz cx="6858000" cy="9144000"/>
@@ -523,19 +524,31 @@
               <a:rPr lang="zh-CN" altLang="en-US">
                 <a:sym typeface="+mn-ea"/>
               </a:rPr>
-              <a:t>改动</a:t>
+              <a:t>更新了第一篇读论文</a:t>
             </a:r>
             <a:r>
               <a:rPr lang="en-US" altLang="zh-CN">
                 <a:sym typeface="+mn-ea"/>
               </a:rPr>
-              <a:t>about</a:t>
+              <a:t>blog</a:t>
             </a:r>
             <a:r>
               <a:rPr lang="zh-CN" altLang="en-US">
                 <a:sym typeface="+mn-ea"/>
               </a:rPr>
-              <a:t>页面细节" &amp;&amp; </a:t>
+              <a:t>和关于脑子图标的</a:t>
+            </a:r>
+            <a:r>
+              <a:rPr lang="en-US" altLang="zh-CN">
+                <a:sym typeface="+mn-ea"/>
+              </a:rPr>
+              <a:t>note</a:t>
+            </a:r>
+            <a:r>
+              <a:rPr lang="zh-CN" altLang="en-US">
+                <a:sym typeface="+mn-ea"/>
+              </a:rPr>
+              <a:t>" &amp;&amp; </a:t>
             </a:r>
             <a:r>
               <a:rPr lang="en-US" altLang="zh-CN">
@@ -3774,7 +3787,7 @@
             </a:r>
             <a:r>
               <a:rPr lang="en-US" altLang="zh-CN" sz="1200"/>
-              <a:t>python scripts/build.py</a:t>
+              <a:t>python build.py</a:t>
             </a:r>
             <a:endParaRPr lang="en-US" altLang="zh-CN" sz="1200"/>
           </a:p>
@@ -4489,45 +4502,8 @@
         </p:nvSpPr>
         <p:spPr/>
         <p:txBody>
-          <a:bodyPr>
-            <a:normAutofit fontScale="90000"/>
-          </a:bodyPr>
-          <a:p>
-            <a:r>
-              <a:rPr lang="zh-CN" altLang="en-US"/>
-              <a:t>如果遇到</a:t>
-            </a:r>
-            <a:r>
-              <a:rPr lang="en-US" altLang="zh-CN"/>
-              <a:t>markdown</a:t>
-            </a:r>
-            <a:r>
-              <a:rPr lang="zh-CN" altLang="en-US"/>
-              <a:t>不能用？</a:t>
-            </a:r>
-            <a:br>
-              <a:rPr lang="zh-CN" altLang="en-US"/>
-            </a:br>
-            <a:r>
-              <a:rPr lang="zh-CN" altLang="en-US"/>
-              <a:t>可能因为回到</a:t>
-            </a:r>
-            <a:r>
-              <a:rPr lang="en-US" altLang="zh-CN"/>
-              <a:t>pytorch</a:t>
-            </a:r>
-            <a:r>
-              <a:rPr lang="zh-CN" altLang="en-US"/>
-              <a:t>老环境，要回</a:t>
-            </a:r>
-            <a:r>
-              <a:rPr lang="en-US" altLang="zh-CN"/>
-              <a:t>my_env</a:t>
-            </a:r>
-            <a:r>
-              <a:rPr lang="zh-CN" altLang="en-US"/>
-              <a:t>。</a:t>
-            </a:r>
+          <a:bodyPr/>
+          <a:p>
             <a:endParaRPr lang="zh-CN" altLang="en-US"/>
           </a:p>
         </p:txBody>
@@ -4549,82 +4525,7 @@
         <p:txBody>
           <a:bodyPr/>
           <a:p>
-            <a:r>
-              <a:rPr lang="zh-CN" altLang="en-US"/>
-              <a:t>在</a:t>
-            </a:r>
-            <a:r>
-              <a:rPr lang="en-US" altLang="zh-CN"/>
-              <a:t>VS</a:t>
-            </a:r>
-            <a:r>
-              <a:rPr lang="zh-CN" altLang="en-US"/>
-              <a:t>终端执行：</a:t>
-            </a:r>
-            <a:r>
-              <a:rPr lang="en-US" altLang="zh-CN"/>
-              <a:t>conda deactivate</a:t>
-            </a:r>
-            <a:endParaRPr lang="en-US" altLang="zh-CN"/>
-          </a:p>
-          <a:p>
-            <a:r>
-              <a:rPr lang="zh-CN" altLang="en-US"/>
-              <a:t>再执行：</a:t>
-            </a:r>
             <a:endParaRPr lang="zh-CN" altLang="en-US"/>
-          </a:p>
-          <a:p>
-            <a:pPr lvl="2"/>
-            <a:r>
-              <a:rPr lang="en-US" altLang="zh-CN"/>
-              <a:t>source /c/Software/Anaconda/etc/profile.d/conda.sh</a:t>
-            </a:r>
-            <a:endParaRPr lang="en-US" altLang="zh-CN"/>
-          </a:p>
-          <a:p>
-            <a:pPr lvl="2"/>
-            <a:r>
-              <a:rPr lang="en-US" altLang="zh-CN"/>
-              <a:t>conda activate my_env</a:t>
-            </a:r>
-            <a:endParaRPr lang="en-US" altLang="zh-CN"/>
-          </a:p>
-          <a:p>
-            <a:pPr lvl="0"/>
-            <a:r>
-              <a:rPr lang="zh-CN" altLang="en-US"/>
-              <a:t>注意看：你的命令行前面应该变成了 (</a:t>
-            </a:r>
-            <a:r>
-              <a:rPr lang="en-US" altLang="zh-CN"/>
-              <a:t>my_env)，</a:t>
-            </a:r>
-            <a:r>
-              <a:rPr lang="zh-CN" altLang="en-US"/>
-              <a:t>千万不要变成别的！</a:t>
-            </a:r>
-            <a:endParaRPr lang="zh-CN" altLang="en-US"/>
-          </a:p>
-          <a:p>
-            <a:pPr lvl="0"/>
-            <a:r>
-              <a:rPr lang="zh-CN" altLang="en-US"/>
-              <a:t>看看有无</a:t>
-            </a:r>
-            <a:r>
-              <a:rPr lang="en-US" altLang="zh-CN"/>
-              <a:t>markdown</a:t>
-            </a:r>
-            <a:r>
-              <a:rPr lang="zh-CN" altLang="en-US"/>
-              <a:t>，执行：</a:t>
-            </a:r>
-            <a:r>
-              <a:rPr lang="en-US" altLang="zh-CN"/>
-              <a:t>python -c "import markdown; print(markdown.__version__)"</a:t>
-            </a:r>
-            <a:endParaRPr lang="en-US" altLang="zh-CN"/>
           </a:p>
         </p:txBody>
       </p:sp>
@@ -4639,6 +4540,181 @@
 </p:sld>
 </file>
 
+<file path=ppt/slides/slide6.xml><?xml version="1.0" encoding="utf-8"?>
+<p:sld xmlns:a="http://schemas.openxmlformats.org/drawingml/2006/main" xmlns:r="http://schemas.openxmlformats.org/officeDocument/2006/relationships" xmlns:p="http://schemas.openxmlformats.org/presentationml/2006/main">
+  <p:cSld>
+    <p:spTree>
+      <p:nvGrpSpPr>
+        <p:cNvPr id="1" name=""/>
+        <p:cNvGrpSpPr/>
+        <p:nvPr/>
+      </p:nvGrpSpPr>
+      <p:grpSpPr/>
+      <p:sp>
+        <p:nvSpPr>
+          <p:cNvPr id="2" name="标题 1"/>
+          <p:cNvSpPr>
+            <a:spLocks noGrp="1"/>
+          </p:cNvSpPr>
+          <p:nvPr>
+            <p:ph type="title"/>
+            <p:custDataLst>
+              <p:tags r:id="rId1"/>
+            </p:custDataLst>
+          </p:nvPr>
+        </p:nvSpPr>
+        <p:spPr/>
+        <p:txBody>
+          <a:bodyPr>
+            <a:normAutofit fontScale="90000"/>
+          </a:bodyPr>
+          <a:p>
+            <a:r>
+              <a:rPr lang="zh-CN" altLang="en-US"/>
+              <a:t>如果遇到</a:t>
+            </a:r>
+            <a:r>
+              <a:rPr lang="en-US" altLang="zh-CN"/>
+              <a:t>markdown</a:t>
+            </a:r>
+            <a:r>
+              <a:rPr lang="zh-CN" altLang="en-US"/>
+              <a:t>不能用？</a:t>
+            </a:r>
+            <a:br>
+              <a:rPr lang="zh-CN" altLang="en-US"/>
+            </a:br>
+            <a:r>
+              <a:rPr lang="zh-CN" altLang="en-US"/>
+              <a:t>可能因为回到</a:t>
+            </a:r>
+            <a:r>
+              <a:rPr lang="en-US" altLang="zh-CN"/>
+              <a:t>pytorch</a:t>
+            </a:r>
+            <a:r>
+              <a:rPr lang="zh-CN" altLang="en-US"/>
+              <a:t>老环境，要回</a:t>
+            </a:r>
+            <a:r>
+              <a:rPr lang="en-US" altLang="zh-CN"/>
+              <a:t>my_env</a:t>
+            </a:r>
+            <a:r>
+              <a:rPr lang="zh-CN" altLang="en-US"/>
+              <a:t>。</a:t>
+            </a:r>
+            <a:endParaRPr lang="zh-CN" altLang="en-US"/>
+          </a:p>
+        </p:txBody>
+      </p:sp>
+      <p:sp>
+        <p:nvSpPr>
+          <p:cNvPr id="3" name="内容占位符 2"/>
+          <p:cNvSpPr>
+            <a:spLocks noGrp="1"/>
+          </p:cNvSpPr>
+          <p:nvPr>
+            <p:ph idx="1"/>
+            <p:custDataLst>
+              <p:tags r:id="rId2"/>
+            </p:custDataLst>
+          </p:nvPr>
+        </p:nvSpPr>
+        <p:spPr/>
+        <p:txBody>
+          <a:bodyPr/>
+          <a:p>
+            <a:r>
+              <a:rPr lang="zh-CN" altLang="en-US"/>
+              <a:t>在</a:t>
+            </a:r>
+            <a:r>
+              <a:rPr lang="en-US" altLang="zh-CN"/>
+              <a:t>VS</a:t>
+            </a:r>
+            <a:r>
+              <a:rPr lang="zh-CN" altLang="en-US"/>
+              <a:t>终端执行：</a:t>
+            </a:r>
+            <a:r>
+              <a:rPr lang="en-US" altLang="zh-CN"/>
+              <a:t>conda deactivate</a:t>
+            </a:r>
+            <a:endParaRPr lang="en-US" altLang="zh-CN"/>
+          </a:p>
+          <a:p>
+            <a:r>
+              <a:rPr lang="zh-CN" altLang="en-US"/>
+              <a:t>再执行：</a:t>
+            </a:r>
+            <a:endParaRPr lang="zh-CN" altLang="en-US"/>
+          </a:p>
+          <a:p>
+            <a:pPr lvl="2"/>
+            <a:r>
+              <a:rPr lang="en-US" altLang="zh-CN"/>
+              <a:t>source /c/Software/Anaconda/etc/profile.d/conda.sh</a:t>
+            </a:r>
+            <a:endParaRPr lang="en-US" altLang="zh-CN"/>
+          </a:p>
+          <a:p>
+            <a:pPr lvl="2"/>
+            <a:r>
+              <a:rPr lang="en-US" altLang="zh-CN"/>
+              <a:t>conda activate my_env</a:t>
+            </a:r>
+            <a:endParaRPr lang="en-US" altLang="zh-CN"/>
+          </a:p>
+          <a:p>
+            <a:pPr lvl="0"/>
+            <a:r>
+              <a:rPr lang="zh-CN" altLang="en-US"/>
+              <a:t>注意看：你的命令行前面应该变成了 (</a:t>
+            </a:r>
+            <a:r>
+              <a:rPr lang="en-US" altLang="zh-CN"/>
+              <a:t>my_env)，</a:t>
+            </a:r>
+            <a:r>
+              <a:rPr lang="zh-CN" altLang="en-US"/>
+              <a:t>千万不要变成别的！</a:t>
+            </a:r>
+            <a:endParaRPr lang="zh-CN" altLang="en-US"/>
+          </a:p>
+          <a:p>
+            <a:pPr lvl="0"/>
+            <a:r>
+              <a:rPr lang="zh-CN" altLang="en-US"/>
+              <a:t>看看有无</a:t>
+            </a:r>
+            <a:r>
+              <a:rPr lang="en-US" altLang="zh-CN"/>
+              <a:t>markdown</a:t>
+            </a:r>
+            <a:r>
+              <a:rPr lang="zh-CN" altLang="en-US"/>
+              <a:t>，执行：</a:t>
+            </a:r>
+            <a:r>
+              <a:rPr lang="en-US" altLang="zh-CN"/>
+              <a:t>python -c "import markdown; print(markdown.__version__)"</a:t>
+            </a:r>
+            <a:endParaRPr lang="en-US" altLang="zh-CN"/>
+          </a:p>
+        </p:txBody>
+      </p:sp>
+    </p:spTree>
+    <p:custDataLst>
+      <p:tags r:id="rId3"/>
+    </p:custDataLst>
+  </p:cSld>
+  <p:clrMapOvr>
+    <a:masterClrMapping/>
+  </p:clrMapOvr>
+</p:sld>
+</file>
+
 <file path=ppt/tags/tag1.xml><?xml version="1.0" encoding="utf-8"?>
 <p:tagLst xmlns:p="http://schemas.openxmlformats.org/presentationml/2006/main">
   <p:tag name="KSO_WM_UNIT_HIGHLIGHT" val="0"/>
@@ -5625,6 +5701,32 @@
 </p:tagLst>
 </file>
 
+<file path=ppt/tags/tag78.xml><?xml version="1.0" encoding="utf-8"?>
+<p:tagLst xmlns:p="http://schemas.openxmlformats.org/presentationml/2006/main">
+  <p:tag name="KSO_WM_UNIT_HIGHLIGHT" val="0"/>
+  <p:tag name="KSO_WM_UNIT_COMPATIBLE" val="0"/>
+  <p:tag name="KSO_WM_UNIT_DIAGRAM_ISNUMVISUAL" val="0"/>
+  <p:tag name="KSO_WM_UNIT_DIAGRAM_ISREFERUNIT" val="0"/>
+  <p:tag name="KSO_WM_UNIT_ID" val="_2**"/>
+  <p:tag name="KSO_WM_UNIT_LAYERLEVEL" val="1"/>
+  <p:tag name="KSO_WM_TAG_VERSION" val="1.0"/>
+  <p:tag name="KSO_WM_BEAUTIFY_FLAG" val="#wm#"/>
+</p:tagLst>
+</file>
+
+<file path=ppt/tags/tag79.xml><?xml version="1.0" encoding="utf-8"?>
+<p:tagLst xmlns:p="http://schemas.openxmlformats.org/presentationml/2006/main">
+  <p:tag name="KSO_WM_UNIT_HIGHLIGHT" val="0"/>
+  <p:tag name="KSO_WM_UNIT_COMPATIBLE" val="0"/>
+  <p:tag name="KSO_WM_UNIT_DIAGRAM_ISNUMVISUAL" val="0"/>
+  <p:tag name="KSO_WM_UNIT_DIAGRAM_ISREFERUNIT" val="0"/>
+  <p:tag name="KSO_WM_UNIT_ID" val="_2**"/>
+  <p:tag name="KSO_WM_UNIT_LAYERLEVEL" val="1"/>
+  <p:tag name="KSO_WM_TAG_VERSION" val="1.0"/>
+  <p:tag name="KSO_WM_BEAUTIFY_FLAG" val="#wm#"/>
+</p:tagLst>
+</file>
+
 <file path=ppt/tags/tag8.xml><?xml version="1.0" encoding="utf-8"?>
 <p:tagLst xmlns:p="http://schemas.openxmlformats.org/presentationml/2006/main">
   <p:tag name="KSO_WM_UNIT_HIGHLIGHT" val="0"/>
@@ -5635,6 +5737,14 @@
   <p:tag name="KSO_WM_UNIT_LAYERLEVEL" val="1"/>
   <p:tag name="KSO_WM_TAG_VERSION" val="1.0"/>
   <p:tag name="KSO_WM_BEAUTIFY_FLAG" val="#wm#"/>
+</p:tagLst>
+</file>
+
+<file path=ppt/tags/tag80.xml><?xml version="1.0" encoding="utf-8"?>
+<p:tagLst xmlns:p="http://schemas.openxmlformats.org/presentationml/2006/main">
+  <p:tag name="KSO_WM_BEAUTIFY_FLAG" val="#wm#"/>
+  <p:tag name="KSO_WM_TEMPLATE_CATEGORY" val="custom"/>
+  <p:tag name="KSO_WM_TEMPLATE_INDEX" val="20205081"/>
 </p:tagLst>
 </file>
 
